--- a/dapan/cnttcb/Cau3.pptx
+++ b/dapan/cnttcb/Cau3.pptx
@@ -303,7 +303,7 @@
           <a:p>
             <a:fld id="{6D839670-7899-4822-B42F-596716C975C7}" type="datetimeFigureOut">
               <a:rPr lang="en-US" smtClean="0"/>
-              <a:t>5/9/2026</a:t>
+              <a:t>5/10/2026</a:t>
             </a:fld>
             <a:endParaRPr lang="en-US"/>
           </a:p>
@@ -641,7 +641,7 @@
           <a:p>
             <a:fld id="{6D839670-7899-4822-B42F-596716C975C7}" type="datetimeFigureOut">
               <a:rPr lang="en-US" smtClean="0"/>
-              <a:t>5/9/2026</a:t>
+              <a:t>5/10/2026</a:t>
             </a:fld>
             <a:endParaRPr lang="en-US"/>
           </a:p>
@@ -1042,7 +1042,7 @@
           <a:p>
             <a:fld id="{6D839670-7899-4822-B42F-596716C975C7}" type="datetimeFigureOut">
               <a:rPr lang="en-US" smtClean="0"/>
-              <a:t>5/9/2026</a:t>
+              <a:t>5/10/2026</a:t>
             </a:fld>
             <a:endParaRPr lang="en-US"/>
           </a:p>
@@ -1378,7 +1378,7 @@
           <a:p>
             <a:fld id="{6D839670-7899-4822-B42F-596716C975C7}" type="datetimeFigureOut">
               <a:rPr lang="en-US" smtClean="0"/>
-              <a:t>5/9/2026</a:t>
+              <a:t>5/10/2026</a:t>
             </a:fld>
             <a:endParaRPr lang="en-US"/>
           </a:p>
@@ -1698,7 +1698,7 @@
           <a:p>
             <a:fld id="{6D839670-7899-4822-B42F-596716C975C7}" type="datetimeFigureOut">
               <a:rPr lang="en-US" smtClean="0"/>
-              <a:t>5/9/2026</a:t>
+              <a:t>5/10/2026</a:t>
             </a:fld>
             <a:endParaRPr lang="en-US"/>
           </a:p>
@@ -2094,7 +2094,7 @@
           <a:p>
             <a:fld id="{6D839670-7899-4822-B42F-596716C975C7}" type="datetimeFigureOut">
               <a:rPr lang="en-US" smtClean="0"/>
-              <a:t>5/9/2026</a:t>
+              <a:t>5/10/2026</a:t>
             </a:fld>
             <a:endParaRPr lang="en-US"/>
           </a:p>
@@ -2351,7 +2351,7 @@
           <a:p>
             <a:fld id="{6D839670-7899-4822-B42F-596716C975C7}" type="datetimeFigureOut">
               <a:rPr lang="en-US" smtClean="0"/>
-              <a:t>5/9/2026</a:t>
+              <a:t>5/10/2026</a:t>
             </a:fld>
             <a:endParaRPr lang="en-US"/>
           </a:p>
@@ -2613,7 +2613,7 @@
           <a:p>
             <a:fld id="{6D839670-7899-4822-B42F-596716C975C7}" type="datetimeFigureOut">
               <a:rPr lang="en-US" smtClean="0"/>
-              <a:t>5/9/2026</a:t>
+              <a:t>5/10/2026</a:t>
             </a:fld>
             <a:endParaRPr lang="en-US"/>
           </a:p>
@@ -2875,7 +2875,7 @@
           <a:p>
             <a:fld id="{6D839670-7899-4822-B42F-596716C975C7}" type="datetimeFigureOut">
               <a:rPr lang="en-US" smtClean="0"/>
-              <a:t>5/9/2026</a:t>
+              <a:t>5/10/2026</a:t>
             </a:fld>
             <a:endParaRPr lang="en-US"/>
           </a:p>
@@ -3204,7 +3204,7 @@
           <a:p>
             <a:fld id="{6D839670-7899-4822-B42F-596716C975C7}" type="datetimeFigureOut">
               <a:rPr lang="en-US" smtClean="0"/>
-              <a:t>5/9/2026</a:t>
+              <a:t>5/10/2026</a:t>
             </a:fld>
             <a:endParaRPr lang="en-US"/>
           </a:p>
@@ -3527,7 +3527,7 @@
           <a:p>
             <a:fld id="{6D839670-7899-4822-B42F-596716C975C7}" type="datetimeFigureOut">
               <a:rPr lang="en-US" smtClean="0"/>
-              <a:t>5/9/2026</a:t>
+              <a:t>5/10/2026</a:t>
             </a:fld>
             <a:endParaRPr lang="en-US"/>
           </a:p>
@@ -3984,7 +3984,7 @@
           <a:p>
             <a:fld id="{6D839670-7899-4822-B42F-596716C975C7}" type="datetimeFigureOut">
               <a:rPr lang="en-US" smtClean="0"/>
-              <a:t>5/9/2026</a:t>
+              <a:t>5/10/2026</a:t>
             </a:fld>
             <a:endParaRPr lang="en-US"/>
           </a:p>
@@ -4189,7 +4189,7 @@
           <a:p>
             <a:fld id="{6D839670-7899-4822-B42F-596716C975C7}" type="datetimeFigureOut">
               <a:rPr lang="en-US" smtClean="0"/>
-              <a:t>5/9/2026</a:t>
+              <a:t>5/10/2026</a:t>
             </a:fld>
             <a:endParaRPr lang="en-US"/>
           </a:p>
@@ -4366,7 +4366,7 @@
           <a:p>
             <a:fld id="{6D839670-7899-4822-B42F-596716C975C7}" type="datetimeFigureOut">
               <a:rPr lang="en-US" smtClean="0"/>
-              <a:t>5/9/2026</a:t>
+              <a:t>5/10/2026</a:t>
             </a:fld>
             <a:endParaRPr lang="en-US"/>
           </a:p>
@@ -4699,7 +4699,7 @@
           <a:p>
             <a:fld id="{6D839670-7899-4822-B42F-596716C975C7}" type="datetimeFigureOut">
               <a:rPr lang="en-US" smtClean="0"/>
-              <a:t>5/9/2026</a:t>
+              <a:t>5/10/2026</a:t>
             </a:fld>
             <a:endParaRPr lang="en-US"/>
           </a:p>
@@ -5044,7 +5044,7 @@
           <a:p>
             <a:fld id="{6D839670-7899-4822-B42F-596716C975C7}" type="datetimeFigureOut">
               <a:rPr lang="en-US" smtClean="0"/>
-              <a:t>5/9/2026</a:t>
+              <a:t>5/10/2026</a:t>
             </a:fld>
             <a:endParaRPr lang="en-US"/>
           </a:p>
@@ -7161,7 +7161,7 @@
           <a:p>
             <a:fld id="{6D839670-7899-4822-B42F-596716C975C7}" type="datetimeFigureOut">
               <a:rPr lang="en-US" smtClean="0"/>
-              <a:t>5/9/2026</a:t>
+              <a:t>5/10/2026</a:t>
             </a:fld>
             <a:endParaRPr lang="en-US"/>
           </a:p>
@@ -7696,8 +7696,8 @@
         </p:nvSpPr>
         <p:spPr>
           <a:xfrm>
-            <a:off x="2272519" y="260648"/>
-            <a:ext cx="8280920" cy="1224136"/>
+            <a:off x="1570183" y="537738"/>
+            <a:ext cx="9578109" cy="1224136"/>
           </a:xfrm>
         </p:spPr>
         <p:txBody>
@@ -7707,7 +7707,7 @@
           <a:lstStyle/>
           <a:p>
             <a:r>
-              <a:rPr lang="vi-VN" sz="2800" b="1" cap="all" dirty="0">
+              <a:rPr lang="vi-VN" sz="3600" b="1" cap="all" dirty="0">
                 <a:ln w="9000" cmpd="sng">
                   <a:solidFill>
                     <a:schemeClr val="accent4">
@@ -7792,38 +7792,37 @@
         </p:blipFill>
         <p:spPr>
           <a:xfrm>
-            <a:off x="5879976" y="2414146"/>
-            <a:ext cx="4064000" cy="2952750"/>
+            <a:off x="6258666" y="2146291"/>
+            <a:ext cx="4464751" cy="3580254"/>
           </a:xfrm>
-          <a:prstGeom prst="rect">
-            <a:avLst/>
+          <a:prstGeom prst="roundRect">
+            <a:avLst>
+              <a:gd name="adj" fmla="val 4167"/>
+            </a:avLst>
           </a:prstGeom>
-          <a:ln w="190500" cap="sq">
+          <a:solidFill>
+            <a:srgbClr val="FFFFFF"/>
+          </a:solidFill>
+          <a:ln w="76200" cap="sq">
             <a:solidFill>
-              <a:srgbClr val="C8C6BD"/>
+              <a:srgbClr val="292929"/>
             </a:solidFill>
-            <a:prstDash val="solid"/>
             <a:miter lim="800000"/>
           </a:ln>
           <a:effectLst>
-            <a:outerShdw blurRad="254000" algn="bl" rotWithShape="0">
-              <a:srgbClr val="000000">
-                <a:alpha val="43000"/>
-              </a:srgbClr>
-            </a:outerShdw>
-            <a:reflection blurRad="6350" stA="52000" endA="300" endPos="35000" dir="5400000" sy="-100000" algn="bl" rotWithShape="0"/>
+            <a:reflection blurRad="12700" stA="28000" endPos="28000" dist="5000" dir="5400000" sy="-100000" algn="bl" rotWithShape="0"/>
           </a:effectLst>
           <a:scene3d>
-            <a:camera prst="perspectiveFront" fov="5400000"/>
+            <a:camera prst="orthographicFront"/>
             <a:lightRig rig="threePt" dir="t">
-              <a:rot lat="0" lon="0" rev="2100000"/>
+              <a:rot lat="0" lon="0" rev="2700000"/>
             </a:lightRig>
           </a:scene3d>
-          <a:sp3d extrusionH="25400">
-            <a:bevelT w="304800" h="152400" prst="hardEdge"/>
-            <a:extrusionClr>
-              <a:srgbClr val="000000"/>
-            </a:extrusionClr>
+          <a:sp3d>
+            <a:bevelT h="38100"/>
+            <a:contourClr>
+              <a:srgbClr val="C0C0C0"/>
+            </a:contourClr>
           </a:sp3d>
         </p:spPr>
       </p:pic>
@@ -8904,8 +8903,8 @@
         </p:nvSpPr>
         <p:spPr>
           <a:xfrm>
-            <a:off x="2592926" y="624110"/>
-            <a:ext cx="9091074" cy="1280890"/>
+            <a:off x="1338064" y="520304"/>
+            <a:ext cx="10668000" cy="1280890"/>
           </a:xfrm>
         </p:spPr>
         <p:txBody>
@@ -8916,7 +8915,7 @@
           <a:p>
             <a:pPr algn="ctr"/>
             <a:r>
-              <a:rPr lang="vi-VN" sz="2800" b="1" cap="all">
+              <a:rPr lang="vi-VN" sz="4400" b="1" cap="all">
                 <a:ln w="9000" cmpd="sng">
                   <a:solidFill>
                     <a:schemeClr val="accent4">
@@ -8953,21 +8952,22 @@
         </p:nvSpPr>
         <p:spPr>
           <a:xfrm>
-            <a:off x="2711624" y="1988840"/>
-            <a:ext cx="7056784" cy="2088232"/>
+            <a:off x="2434534" y="1434658"/>
+            <a:ext cx="8492084" cy="2088232"/>
           </a:xfrm>
         </p:spPr>
         <p:txBody>
           <a:bodyPr>
-            <a:normAutofit/>
+            <a:noAutofit/>
           </a:bodyPr>
           <a:lstStyle/>
           <a:p>
+            <a:pPr algn="just"/>
             <a:r>
-              <a:rPr lang="vi-VN" smtClean="0"/>
+              <a:rPr lang="vi-VN" sz="2400" smtClean="0"/>
               <a:t>Nằm trên bán đảo hòn hẻo và cách trung tâm thành phố 15km về phía bắc. Đapr hoa lan mang đến cho du khách một không gian nhẹ nhàng dễ chịu với những tiếng chim hot tiếng suối nước chảy róc rách và những con đường rợp bóng cây xanh mát. Cũng như sác hương của hơn 100 loài hoa lan hiện tại</a:t>
             </a:r>
-            <a:endParaRPr lang="vi-VN"/>
+            <a:endParaRPr lang="vi-VN" sz="2400"/>
           </a:p>
         </p:txBody>
       </p:sp>
@@ -8993,44 +8993,38 @@
         </p:blipFill>
         <p:spPr>
           <a:xfrm>
-            <a:off x="5015880" y="3645023"/>
+            <a:off x="6816080" y="3703970"/>
             <a:ext cx="3312368" cy="2208245"/>
           </a:xfrm>
-          <a:prstGeom prst="rect">
-            <a:avLst/>
+          <a:prstGeom prst="roundRect">
+            <a:avLst>
+              <a:gd name="adj" fmla="val 11111"/>
+            </a:avLst>
           </a:prstGeom>
-          <a:solidFill>
-            <a:srgbClr val="FFFFFF">
-              <a:shade val="85000"/>
-            </a:srgbClr>
-          </a:solidFill>
-          <a:ln w="190500" cap="sq">
+          <a:ln w="190500" cap="rnd">
             <a:solidFill>
-              <a:srgbClr val="FFFFFF"/>
+              <a:srgbClr val="C8C6BD"/>
             </a:solidFill>
-            <a:miter lim="800000"/>
+            <a:prstDash val="solid"/>
           </a:ln>
           <a:effectLst>
-            <a:outerShdw blurRad="65000" dist="50800" dir="12900000" kx="195000" ky="145000" algn="tl" rotWithShape="0">
+            <a:outerShdw blurRad="101600" dist="50800" dir="7200000" algn="tl" rotWithShape="0">
               <a:srgbClr val="000000">
-                <a:alpha val="30000"/>
+                <a:alpha val="45000"/>
               </a:srgbClr>
             </a:outerShdw>
-            <a:reflection blurRad="6350" stA="52000" endA="300" endPos="35000" dir="5400000" sy="-100000" algn="bl" rotWithShape="0"/>
           </a:effectLst>
           <a:scene3d>
-            <a:camera prst="orthographicFront">
-              <a:rot lat="0" lon="0" rev="360000"/>
-            </a:camera>
-            <a:lightRig rig="twoPt" dir="t">
-              <a:rot lat="0" lon="0" rev="7200000"/>
+            <a:camera prst="perspectiveFront" fov="5400000"/>
+            <a:lightRig rig="threePt" dir="t">
+              <a:rot lat="0" lon="0" rev="19200000"/>
             </a:lightRig>
           </a:scene3d>
-          <a:sp3d contourW="12700">
-            <a:bevelT w="25400" h="19050"/>
-            <a:contourClr>
-              <a:srgbClr val="969696"/>
-            </a:contourClr>
+          <a:sp3d extrusionH="25400">
+            <a:bevelT w="304800" h="152400" prst="hardEdge"/>
+            <a:extrusionClr>
+              <a:srgbClr val="FFFFFF"/>
+            </a:extrusionClr>
           </a:sp3d>
         </p:spPr>
       </p:pic>
@@ -9407,7 +9401,7 @@
         <p:spPr>
           <a:xfrm>
             <a:off x="1516863" y="2967335"/>
-            <a:ext cx="9158277" cy="923330"/>
+            <a:ext cx="10000882" cy="923330"/>
           </a:xfrm>
           <a:prstGeom prst="rect">
             <a:avLst/>
@@ -9415,7 +9409,7 @@
           <a:noFill/>
         </p:spPr>
         <p:txBody>
-          <a:bodyPr wrap="none" lIns="91440" tIns="45720" rIns="91440" bIns="45720">
+          <a:bodyPr wrap="square" lIns="91440" tIns="45720" rIns="91440" bIns="45720">
             <a:spAutoFit/>
           </a:bodyPr>
           <a:lstStyle/>

--- a/dapan/cnttcb/Cau3.pptx
+++ b/dapan/cnttcb/Cau3.pptx
@@ -7792,7 +7792,7 @@
         </p:blipFill>
         <p:spPr>
           <a:xfrm>
-            <a:off x="6258666" y="2146291"/>
+            <a:off x="6258666" y="2183235"/>
             <a:ext cx="4464751" cy="3580254"/>
           </a:xfrm>
           <a:prstGeom prst="roundRect">
